--- a/Medical Web Design.pptx
+++ b/Medical Web Design.pptx
@@ -5708,7 +5708,7 @@
           <p:nvPr/>
         </p:nvPicPr>
         <p:blipFill>
-          <a:blip r:embed="rId2">
+          <a:blip r:embed="rId2" cstate="print">
             <a:alphaModFix/>
             <a:extLst>
               <a:ext uri="{BEBA8EAE-BF5A-486C-A8C5-ECC9F3942E4B}">
